--- a/Presentation_Eniac's Discount Strategy Analysis.pptx
+++ b/Presentation_Eniac's Discount Strategy Analysis.pptx
@@ -310,7 +310,7 @@
       </p15:sldGuideLst>
     </p:ext>
     <p:ext uri="GoogleSlidesCustomDataVersion2">
-      <go:slidesCustomData xmlns="" xmlns:mc="http://schemas.openxmlformats.org/markup-compatibility/2006" xmlns:mv="urn:schemas-microsoft-com:mac:vml" xmlns:c="http://schemas.openxmlformats.org/drawingml/2006/chart" xmlns:dgm="http://schemas.openxmlformats.org/drawingml/2006/diagram" xmlns:o="urn:schemas-microsoft-com:office:office" xmlns:v="urn:schemas-microsoft-com:vml" xmlns:pvml="urn:schemas-microsoft-com:office:powerpoint" xmlns:com="http://schemas.openxmlformats.org/drawingml/2006/compatibility" xmlns:p14="http://schemas.microsoft.com/office/powerpoint/2010/main" xmlns:p15="http://schemas.microsoft.com/office/powerpoint/2012/main" xmlns:ahyp="http://schemas.microsoft.com/office/drawing/2018/hyperlinkcolor" xmlns:go="http://customooxmlschemas.google.com/" r:id="rId44" roundtripDataSignature="AMtx7mhAENS9+G7f7Uzk6tNl0sgruuQr7w=="/>
+      <go:slidesCustomData xmlns:go="http://customooxmlschemas.google.com/" xmlns:ahyp="http://schemas.microsoft.com/office/drawing/2018/hyperlinkcolor" xmlns:p15="http://schemas.microsoft.com/office/powerpoint/2012/main" xmlns:p14="http://schemas.microsoft.com/office/powerpoint/2010/main" xmlns:com="http://schemas.openxmlformats.org/drawingml/2006/compatibility" xmlns:pvml="urn:schemas-microsoft-com:office:powerpoint" xmlns:v="urn:schemas-microsoft-com:vml" xmlns:o="urn:schemas-microsoft-com:office:office" xmlns:dgm="http://schemas.openxmlformats.org/drawingml/2006/diagram" xmlns:c="http://schemas.openxmlformats.org/drawingml/2006/chart" xmlns:mv="urn:schemas-microsoft-com:mac:vml" xmlns:mc="http://schemas.openxmlformats.org/markup-compatibility/2006" xmlns="" r:id="rId44" roundtripDataSignature="AMtx7mhAENS9+G7f7Uzk6tNl0sgruuQr7w=="/>
     </p:ext>
   </p:extLst>
 </p:presentation>
@@ -25733,7 +25733,7 @@
                 <a:buNone/>
               </a:pPr>
               <a:r>
-                <a:rPr lang="en" sz="2800" b="0" i="0" u="none" strike="noStrike" cap="none">
+                <a:rPr lang="en" sz="2800" b="0" i="0" u="none" strike="noStrike" cap="none" dirty="0">
                   <a:solidFill>
                     <a:srgbClr val="004A75"/>
                   </a:solidFill>
@@ -25742,9 +25742,9 @@
                   <a:cs typeface="Merriweather"/>
                   <a:sym typeface="Merriweather"/>
                 </a:rPr>
-                <a:t>100%</a:t>
+                <a:t>94%</a:t>
               </a:r>
-              <a:endParaRPr/>
+              <a:endParaRPr dirty="0"/>
             </a:p>
             <a:p>
               <a:pPr marL="0" marR="0" lvl="0" indent="0" algn="ctr" rtl="0">
@@ -25765,7 +25765,7 @@
                 <a:buNone/>
               </a:pPr>
               <a:r>
-                <a:rPr lang="en" sz="1800" b="0" i="0" u="none" strike="noStrike" cap="none">
+                <a:rPr lang="en" sz="1800" b="0" i="0" u="none" strike="noStrike" cap="none" dirty="0">
                   <a:solidFill>
                     <a:srgbClr val="004A75"/>
                   </a:solidFill>
@@ -25774,9 +25774,9 @@
                   <a:cs typeface="Merriweather"/>
                   <a:sym typeface="Merriweather"/>
                 </a:rPr>
-                <a:t>(175 of 175 Brands)</a:t>
+                <a:t>(175 of 187 Brands)</a:t>
               </a:r>
-              <a:endParaRPr/>
+              <a:endParaRPr dirty="0"/>
             </a:p>
           </p:txBody>
         </p:sp>

--- a/Presentation_Eniac's Discount Strategy Analysis.pptx
+++ b/Presentation_Eniac's Discount Strategy Analysis.pptx
@@ -310,7 +310,7 @@
       </p15:sldGuideLst>
     </p:ext>
     <p:ext uri="GoogleSlidesCustomDataVersion2">
-      <go:slidesCustomData xmlns:go="http://customooxmlschemas.google.com/" xmlns:ahyp="http://schemas.microsoft.com/office/drawing/2018/hyperlinkcolor" xmlns:p15="http://schemas.microsoft.com/office/powerpoint/2012/main" xmlns:p14="http://schemas.microsoft.com/office/powerpoint/2010/main" xmlns:com="http://schemas.openxmlformats.org/drawingml/2006/compatibility" xmlns:pvml="urn:schemas-microsoft-com:office:powerpoint" xmlns:v="urn:schemas-microsoft-com:vml" xmlns:o="urn:schemas-microsoft-com:office:office" xmlns:dgm="http://schemas.openxmlformats.org/drawingml/2006/diagram" xmlns:c="http://schemas.openxmlformats.org/drawingml/2006/chart" xmlns:mv="urn:schemas-microsoft-com:mac:vml" xmlns:mc="http://schemas.openxmlformats.org/markup-compatibility/2006" xmlns="" r:id="rId44" roundtripDataSignature="AMtx7mhAENS9+G7f7Uzk6tNl0sgruuQr7w=="/>
+      <go:slidesCustomData xmlns="" xmlns:mc="http://schemas.openxmlformats.org/markup-compatibility/2006" xmlns:mv="urn:schemas-microsoft-com:mac:vml" xmlns:c="http://schemas.openxmlformats.org/drawingml/2006/chart" xmlns:dgm="http://schemas.openxmlformats.org/drawingml/2006/diagram" xmlns:o="urn:schemas-microsoft-com:office:office" xmlns:v="urn:schemas-microsoft-com:vml" xmlns:pvml="urn:schemas-microsoft-com:office:powerpoint" xmlns:com="http://schemas.openxmlformats.org/drawingml/2006/compatibility" xmlns:p14="http://schemas.microsoft.com/office/powerpoint/2010/main" xmlns:p15="http://schemas.microsoft.com/office/powerpoint/2012/main" xmlns:ahyp="http://schemas.microsoft.com/office/drawing/2018/hyperlinkcolor" xmlns:go="http://customooxmlschemas.google.com/" r:id="rId44" roundtripDataSignature="AMtx7mhAENS9+G7f7Uzk6tNl0sgruuQr7w=="/>
     </p:ext>
   </p:extLst>
 </p:presentation>
@@ -921,7 +921,7 @@
         </p:nvSpPr>
         <p:spPr>
           <a:xfrm>
-            <a:off x="381300" y="685800"/>
+            <a:off x="381000" y="685800"/>
             <a:ext cx="6096000" cy="3429000"/>
           </a:xfrm>
           <a:custGeom>
@@ -20863,8 +20863,8 @@
         </p:nvSpPr>
         <p:spPr>
           <a:xfrm>
-            <a:off x="631350" y="3817683"/>
-            <a:ext cx="3396900" cy="869700"/>
+            <a:off x="631350" y="4325776"/>
+            <a:ext cx="3396900" cy="361607"/>
           </a:xfrm>
           <a:prstGeom prst="rect">
             <a:avLst/>
@@ -20894,70 +20894,14 @@
               <a:buNone/>
             </a:pPr>
             <a:r>
-              <a:rPr lang="en"/>
-              <a:t>Group Sweeper Stars:</a:t>
+              <a:rPr lang="en" dirty="0"/>
+              <a:t>Gracia Emerentiana [</a:t>
             </a:r>
-            <a:endParaRPr/>
-          </a:p>
-          <a:p>
-            <a:pPr marL="0" lvl="0" indent="0" algn="ctr" rtl="0">
-              <a:lnSpc>
-                <a:spcPct val="115000"/>
-              </a:lnSpc>
-              <a:spcBef>
-                <a:spcPts val="0"/>
-              </a:spcBef>
-              <a:spcAft>
-                <a:spcPts val="0"/>
-              </a:spcAft>
-              <a:buSzPts val="1000"/>
-              <a:buNone/>
-            </a:pPr>
             <a:r>
               <a:rPr lang="en"/>
-              <a:t>Deodata [E-DS-55]</a:t>
+              <a:t>E-DA-55]</a:t>
             </a:r>
-            <a:endParaRPr/>
-          </a:p>
-          <a:p>
-            <a:pPr marL="0" lvl="0" indent="0" algn="ctr" rtl="0">
-              <a:lnSpc>
-                <a:spcPct val="115000"/>
-              </a:lnSpc>
-              <a:spcBef>
-                <a:spcPts val="0"/>
-              </a:spcBef>
-              <a:spcAft>
-                <a:spcPts val="0"/>
-              </a:spcAft>
-              <a:buSzPts val="1000"/>
-              <a:buNone/>
-            </a:pPr>
-            <a:r>
-              <a:rPr lang="en"/>
-              <a:t>Gracia Emerentiana [E-DA-55]</a:t>
-            </a:r>
-            <a:endParaRPr/>
-          </a:p>
-          <a:p>
-            <a:pPr marL="0" lvl="0" indent="0" algn="ctr" rtl="0">
-              <a:lnSpc>
-                <a:spcPct val="115000"/>
-              </a:lnSpc>
-              <a:spcBef>
-                <a:spcPts val="0"/>
-              </a:spcBef>
-              <a:spcAft>
-                <a:spcPts val="0"/>
-              </a:spcAft>
-              <a:buSzPts val="1000"/>
-              <a:buNone/>
-            </a:pPr>
-            <a:r>
-              <a:rPr lang="en"/>
-              <a:t>Manuel Baptista Rosal[E-DA-55] </a:t>
-            </a:r>
-            <a:endParaRPr/>
+            <a:endParaRPr dirty="0"/>
           </a:p>
         </p:txBody>
       </p:sp>
